--- a/graph/漢方体質_ver2.1.pptx
+++ b/graph/漢方体質_ver2.1.pptx
@@ -1340,7 +1340,7 @@
             </a:pPr>
             <a:fld id="{9F1D0CCF-8D68-49AB-8FC4-261B3E5B68D5}" type="datetimeFigureOut">
               <a:rPr lang="en-US" altLang="ja-JP"/>
-              <a:t>8/28/2026</a:t>
+              <a:t>9/2/2026</a:t>
             </a:fld>
             <a:endParaRPr lang="ja-JP"/>
           </a:p>
@@ -3596,7 +3596,7 @@
             </a:pPr>
             <a:fld id="{0170BF8F-7D5B-4E0A-8D9F-5F7FFC045F9B}" type="datetimeFigureOut">
               <a:rPr lang="en-US" altLang="ja-JP"/>
-              <a:t>8/28/2026</a:t>
+              <a:t>9/2/2026</a:t>
             </a:fld>
             <a:endParaRPr lang="ja-JP"/>
           </a:p>
@@ -3878,7 +3878,7 @@
             </a:pPr>
             <a:fld id="{0170BF8F-7D5B-4E0A-8D9F-5F7FFC045F9B}" type="datetimeFigureOut">
               <a:rPr lang="en-US" altLang="ja-JP"/>
-              <a:t>8/28/2026</a:t>
+              <a:t>9/2/2026</a:t>
             </a:fld>
             <a:endParaRPr lang="ja-JP"/>
           </a:p>
@@ -4256,7 +4256,7 @@
             </a:pPr>
             <a:fld id="{0170BF8F-7D5B-4E0A-8D9F-5F7FFC045F9B}" type="datetimeFigureOut">
               <a:rPr lang="en-US" altLang="ja-JP"/>
-              <a:t>8/28/2026</a:t>
+              <a:t>9/2/2026</a:t>
             </a:fld>
             <a:endParaRPr lang="ja-JP"/>
           </a:p>
@@ -4814,7 +4814,7 @@
     <mc:Choice Requires="p159">
       <p:transition/>
     </mc:Choice>
-    <mc:Fallback xmlns="" xmlns:m="http://schemas.openxmlformats.org/officeDocument/2006/math" xmlns:w="http://schemas.openxmlformats.org/wordprocessingml/2006/main">
+    <mc:Fallback xmlns:w="http://schemas.openxmlformats.org/wordprocessingml/2006/main" xmlns:m="http://schemas.openxmlformats.org/officeDocument/2006/math" xmlns="">
       <p:transition advClick="1"/>
     </mc:Fallback>
   </mc:AlternateContent>
@@ -4871,7 +4871,7 @@
     <mc:Choice Requires="p159">
       <p:transition/>
     </mc:Choice>
-    <mc:Fallback xmlns="" xmlns:m="http://schemas.openxmlformats.org/officeDocument/2006/math" xmlns:w="http://schemas.openxmlformats.org/wordprocessingml/2006/main">
+    <mc:Fallback xmlns:w="http://schemas.openxmlformats.org/wordprocessingml/2006/main" xmlns:m="http://schemas.openxmlformats.org/officeDocument/2006/math" xmlns="">
       <p:transition advClick="1"/>
     </mc:Fallback>
   </mc:AlternateContent>
@@ -4928,7 +4928,7 @@
     <mc:Choice Requires="p159">
       <p:transition/>
     </mc:Choice>
-    <mc:Fallback xmlns="" xmlns:m="http://schemas.openxmlformats.org/officeDocument/2006/math" xmlns:w="http://schemas.openxmlformats.org/wordprocessingml/2006/main">
+    <mc:Fallback xmlns:w="http://schemas.openxmlformats.org/wordprocessingml/2006/main" xmlns:m="http://schemas.openxmlformats.org/officeDocument/2006/math" xmlns="">
       <p:transition advClick="1"/>
     </mc:Fallback>
   </mc:AlternateContent>
@@ -7577,7 +7577,7 @@
     <mc:Choice Requires="p159">
       <p:transition/>
     </mc:Choice>
-    <mc:Fallback xmlns="" xmlns:m="http://schemas.openxmlformats.org/officeDocument/2006/math" xmlns:w="http://schemas.openxmlformats.org/wordprocessingml/2006/main">
+    <mc:Fallback xmlns:w="http://schemas.openxmlformats.org/wordprocessingml/2006/main" xmlns:m="http://schemas.openxmlformats.org/officeDocument/2006/math" xmlns="">
       <p:transition advClick="1"/>
     </mc:Fallback>
   </mc:AlternateContent>
@@ -8121,7 +8121,7 @@
     <mc:Choice Requires="p159">
       <p:transition/>
     </mc:Choice>
-    <mc:Fallback xmlns="" xmlns:m="http://schemas.openxmlformats.org/officeDocument/2006/math" xmlns:w="http://schemas.openxmlformats.org/wordprocessingml/2006/main">
+    <mc:Fallback xmlns:w="http://schemas.openxmlformats.org/wordprocessingml/2006/main" xmlns:m="http://schemas.openxmlformats.org/officeDocument/2006/math" xmlns="">
       <p:transition advClick="1"/>
     </mc:Fallback>
   </mc:AlternateContent>
@@ -10409,7 +10409,7 @@
     <mc:Choice Requires="p159">
       <p:transition/>
     </mc:Choice>
-    <mc:Fallback xmlns="" xmlns:m="http://schemas.openxmlformats.org/officeDocument/2006/math" xmlns:w="http://schemas.openxmlformats.org/wordprocessingml/2006/main">
+    <mc:Fallback xmlns:w="http://schemas.openxmlformats.org/wordprocessingml/2006/main" xmlns:m="http://schemas.openxmlformats.org/officeDocument/2006/math" xmlns="">
       <p:transition advClick="1"/>
     </mc:Fallback>
   </mc:AlternateContent>
@@ -10956,7 +10956,7 @@
     <mc:Choice Requires="p159">
       <p:transition/>
     </mc:Choice>
-    <mc:Fallback xmlns="" xmlns:m="http://schemas.openxmlformats.org/officeDocument/2006/math" xmlns:w="http://schemas.openxmlformats.org/wordprocessingml/2006/main">
+    <mc:Fallback xmlns:w="http://schemas.openxmlformats.org/wordprocessingml/2006/main" xmlns:m="http://schemas.openxmlformats.org/officeDocument/2006/math" xmlns="">
       <p:transition advClick="1"/>
     </mc:Fallback>
   </mc:AlternateContent>
@@ -11470,7 +11470,7 @@
     <mc:Choice Requires="p159">
       <p:transition/>
     </mc:Choice>
-    <mc:Fallback xmlns="" xmlns:m="http://schemas.openxmlformats.org/officeDocument/2006/math" xmlns:w="http://schemas.openxmlformats.org/wordprocessingml/2006/main">
+    <mc:Fallback xmlns:w="http://schemas.openxmlformats.org/wordprocessingml/2006/main" xmlns:m="http://schemas.openxmlformats.org/officeDocument/2006/math" xmlns="">
       <p:transition advClick="1"/>
     </mc:Fallback>
   </mc:AlternateContent>
@@ -16770,7 +16770,7 @@
     <mc:Choice Requires="p159">
       <p:transition/>
     </mc:Choice>
-    <mc:Fallback xmlns="" xmlns:m="http://schemas.openxmlformats.org/officeDocument/2006/math" xmlns:w="http://schemas.openxmlformats.org/wordprocessingml/2006/main">
+    <mc:Fallback xmlns:w="http://schemas.openxmlformats.org/wordprocessingml/2006/main" xmlns:m="http://schemas.openxmlformats.org/officeDocument/2006/math" xmlns="">
       <p:transition advClick="1"/>
     </mc:Fallback>
   </mc:AlternateContent>
@@ -17878,7 +17878,7 @@
     <mc:Choice Requires="p159">
       <p:transition/>
     </mc:Choice>
-    <mc:Fallback xmlns="" xmlns:m="http://schemas.openxmlformats.org/officeDocument/2006/math" xmlns:w="http://schemas.openxmlformats.org/wordprocessingml/2006/main">
+    <mc:Fallback xmlns:w="http://schemas.openxmlformats.org/wordprocessingml/2006/main" xmlns:m="http://schemas.openxmlformats.org/officeDocument/2006/math" xmlns="">
       <p:transition advClick="1"/>
     </mc:Fallback>
   </mc:AlternateContent>
@@ -18449,7 +18449,7 @@
     <mc:Choice Requires="p159">
       <p:transition/>
     </mc:Choice>
-    <mc:Fallback xmlns="" xmlns:m="http://schemas.openxmlformats.org/officeDocument/2006/math" xmlns:w="http://schemas.openxmlformats.org/wordprocessingml/2006/main">
+    <mc:Fallback xmlns:w="http://schemas.openxmlformats.org/wordprocessingml/2006/main" xmlns:m="http://schemas.openxmlformats.org/officeDocument/2006/math" xmlns="">
       <p:transition advClick="1"/>
     </mc:Fallback>
   </mc:AlternateContent>
@@ -20437,7 +20437,7 @@
     <mc:Choice Requires="p159">
       <p:transition/>
     </mc:Choice>
-    <mc:Fallback xmlns="" xmlns:m="http://schemas.openxmlformats.org/officeDocument/2006/math" xmlns:w="http://schemas.openxmlformats.org/wordprocessingml/2006/main">
+    <mc:Fallback xmlns:w="http://schemas.openxmlformats.org/wordprocessingml/2006/main" xmlns:m="http://schemas.openxmlformats.org/officeDocument/2006/math" xmlns="">
       <p:transition advClick="1"/>
     </mc:Fallback>
   </mc:AlternateContent>
@@ -21576,7 +21576,7 @@
     <mc:Choice Requires="p159">
       <p:transition/>
     </mc:Choice>
-    <mc:Fallback xmlns="" xmlns:m="http://schemas.openxmlformats.org/officeDocument/2006/math" xmlns:w="http://schemas.openxmlformats.org/wordprocessingml/2006/main">
+    <mc:Fallback xmlns:w="http://schemas.openxmlformats.org/wordprocessingml/2006/main" xmlns:m="http://schemas.openxmlformats.org/officeDocument/2006/math" xmlns="">
       <p:transition advClick="1"/>
     </mc:Fallback>
   </mc:AlternateContent>
@@ -22081,7 +22081,7 @@
     <mc:Choice Requires="p159">
       <p:transition/>
     </mc:Choice>
-    <mc:Fallback xmlns="" xmlns:m="http://schemas.openxmlformats.org/officeDocument/2006/math" xmlns:w="http://schemas.openxmlformats.org/wordprocessingml/2006/main">
+    <mc:Fallback xmlns:w="http://schemas.openxmlformats.org/wordprocessingml/2006/main" xmlns:m="http://schemas.openxmlformats.org/officeDocument/2006/math" xmlns="">
       <p:transition advClick="1"/>
     </mc:Fallback>
   </mc:AlternateContent>
@@ -22320,7 +22320,7 @@
     <mc:Choice Requires="p159">
       <p:transition/>
     </mc:Choice>
-    <mc:Fallback xmlns="" xmlns:m="http://schemas.openxmlformats.org/officeDocument/2006/math" xmlns:w="http://schemas.openxmlformats.org/wordprocessingml/2006/main">
+    <mc:Fallback xmlns:w="http://schemas.openxmlformats.org/wordprocessingml/2006/main" xmlns:m="http://schemas.openxmlformats.org/officeDocument/2006/math" xmlns="">
       <p:transition advClick="1"/>
     </mc:Fallback>
   </mc:AlternateContent>
@@ -22711,7 +22711,7 @@
     <mc:Choice Requires="p159">
       <p:transition/>
     </mc:Choice>
-    <mc:Fallback xmlns="" xmlns:m="http://schemas.openxmlformats.org/officeDocument/2006/math" xmlns:w="http://schemas.openxmlformats.org/wordprocessingml/2006/main">
+    <mc:Fallback xmlns:w="http://schemas.openxmlformats.org/wordprocessingml/2006/main" xmlns:m="http://schemas.openxmlformats.org/officeDocument/2006/math" xmlns="">
       <p:transition advClick="1"/>
     </mc:Fallback>
   </mc:AlternateContent>
@@ -23096,13 +23096,15 @@
       <p:cxnSp>
         <p:nvCxnSpPr>
           <p:cNvPr id="1982322419" name="直線矢印コネクタ 11"/>
-          <p:cNvCxnSpPr/>
+          <p:cNvCxnSpPr>
+            <a:cxnSpLocks/>
+          </p:cNvCxnSpPr>
           <p:nvPr/>
         </p:nvCxnSpPr>
         <p:spPr bwMode="auto">
           <a:xfrm flipH="1">
-            <a:off x="7334270" y="3944931"/>
-            <a:ext cx="184130" cy="1078385"/>
+            <a:off x="7398327" y="3944931"/>
+            <a:ext cx="120073" cy="1100894"/>
           </a:xfrm>
           <a:prstGeom prst="straightConnector1">
             <a:avLst/>
@@ -23134,8 +23136,8 @@
         </p:nvSpPr>
         <p:spPr bwMode="auto">
           <a:xfrm flipH="1">
-            <a:off x="6871357" y="3420041"/>
-            <a:ext cx="1792630" cy="338554"/>
+            <a:off x="6939808" y="3078625"/>
+            <a:ext cx="1956759" cy="830997"/>
           </a:xfrm>
           <a:prstGeom prst="rect">
             <a:avLst/>
@@ -23152,13 +23154,43 @@
               <a:defRPr/>
             </a:pPr>
             <a:r>
-              <a:rPr lang="en-US" sz="1600">
+              <a:rPr lang="ja-JP" altLang="en-US" sz="1600" dirty="0">
                 <a:latin typeface="BIZ UDPゴシック"/>
                 <a:ea typeface="BIZ UDPゴシック"/>
               </a:rPr>
-              <a:t>n_clusters=5</a:t>
-            </a:r>
-            <a:endParaRPr lang="ja-JP" sz="1600">
+              <a:t>値が小さくなる</a:t>
+            </a:r>
+            <a:endParaRPr lang="en-US" sz="1600" dirty="0">
+              <a:latin typeface="BIZ UDPゴシック"/>
+              <a:ea typeface="BIZ UDPゴシック"/>
+            </a:endParaRPr>
+          </a:p>
+          <a:p>
+            <a:pPr>
+              <a:defRPr/>
+            </a:pPr>
+            <a:r>
+              <a:rPr lang="en-US" sz="1600" dirty="0" err="1">
+                <a:latin typeface="BIZ UDPゴシック"/>
+                <a:ea typeface="BIZ UDPゴシック"/>
+              </a:rPr>
+              <a:t>n_clusters</a:t>
+            </a:r>
+            <a:r>
+              <a:rPr lang="en-US" sz="1600" dirty="0">
+                <a:latin typeface="BIZ UDPゴシック"/>
+                <a:ea typeface="BIZ UDPゴシック"/>
+              </a:rPr>
+              <a:t>=5</a:t>
+            </a:r>
+            <a:r>
+              <a:rPr lang="ja-JP" altLang="en-US" sz="1600" dirty="0">
+                <a:latin typeface="BIZ UDPゴシック"/>
+                <a:ea typeface="BIZ UDPゴシック"/>
+              </a:rPr>
+              <a:t>が最適クラスター数</a:t>
+            </a:r>
+            <a:endParaRPr lang="ja-JP" sz="1600" dirty="0">
               <a:latin typeface="BIZ UDPゴシック"/>
               <a:ea typeface="BIZ UDPゴシック"/>
             </a:endParaRPr>
@@ -23174,7 +23206,7 @@
     <mc:Choice Requires="p159">
       <p:transition/>
     </mc:Choice>
-    <mc:Fallback xmlns="" xmlns:m="http://schemas.openxmlformats.org/officeDocument/2006/math" xmlns:w="http://schemas.openxmlformats.org/wordprocessingml/2006/main">
+    <mc:Fallback xmlns:w="http://schemas.openxmlformats.org/wordprocessingml/2006/main" xmlns:m="http://schemas.openxmlformats.org/officeDocument/2006/math" xmlns="">
       <p:transition advClick="1"/>
     </mc:Fallback>
   </mc:AlternateContent>
@@ -24452,7 +24484,7 @@
     <mc:Choice Requires="p159">
       <p:transition/>
     </mc:Choice>
-    <mc:Fallback xmlns="" xmlns:m="http://schemas.openxmlformats.org/officeDocument/2006/math" xmlns:w="http://schemas.openxmlformats.org/wordprocessingml/2006/main">
+    <mc:Fallback xmlns:w="http://schemas.openxmlformats.org/wordprocessingml/2006/main" xmlns:m="http://schemas.openxmlformats.org/officeDocument/2006/math" xmlns="">
       <p:transition advClick="1"/>
     </mc:Fallback>
   </mc:AlternateContent>
@@ -24833,7 +24865,7 @@
     <mc:Choice Requires="p159">
       <p:transition/>
     </mc:Choice>
-    <mc:Fallback xmlns="" xmlns:m="http://schemas.openxmlformats.org/officeDocument/2006/math" xmlns:w="http://schemas.openxmlformats.org/wordprocessingml/2006/main">
+    <mc:Fallback xmlns:w="http://schemas.openxmlformats.org/wordprocessingml/2006/main" xmlns:m="http://schemas.openxmlformats.org/officeDocument/2006/math" xmlns="">
       <p:transition advClick="1"/>
     </mc:Fallback>
   </mc:AlternateContent>
@@ -26146,7 +26178,7 @@
     <mc:Choice Requires="p159">
       <p:transition/>
     </mc:Choice>
-    <mc:Fallback xmlns="" xmlns:m="http://schemas.openxmlformats.org/officeDocument/2006/math" xmlns:w="http://schemas.openxmlformats.org/wordprocessingml/2006/main">
+    <mc:Fallback xmlns:w="http://schemas.openxmlformats.org/wordprocessingml/2006/main" xmlns:m="http://schemas.openxmlformats.org/officeDocument/2006/math" xmlns="">
       <p:transition advClick="1"/>
     </mc:Fallback>
   </mc:AlternateContent>
@@ -26402,7 +26434,7 @@
     <mc:Choice Requires="p159">
       <p:transition/>
     </mc:Choice>
-    <mc:Fallback xmlns="" xmlns:m="http://schemas.openxmlformats.org/officeDocument/2006/math" xmlns:w="http://schemas.openxmlformats.org/wordprocessingml/2006/main">
+    <mc:Fallback xmlns:w="http://schemas.openxmlformats.org/wordprocessingml/2006/main" xmlns:m="http://schemas.openxmlformats.org/officeDocument/2006/math" xmlns="">
       <p:transition advClick="1"/>
     </mc:Fallback>
   </mc:AlternateContent>
